--- a/交付物-doc-pdf-ppt/AI内容课_VerB_CMO战略版_幻灯片_可编辑源(PPTX含NLP备注).pptx
+++ b/交付物-doc-pdf-ppt/AI内容课_VerB_CMO战略版_幻灯片_可编辑源(PPTX含NLP备注).pptx
@@ -9797,6 +9797,27 @@
               <a:t>把账号一个个连上</a:t>
             </a:r>
           </a:p>
+          <a:p>
+            <a:pPr algn="l">
+              <a:lnSpc>
+                <a:spcPct val="122000"/>
+              </a:lnSpc>
+              <a:spcAft>
+                <a:spcPts val="800"/>
+              </a:spcAft>
+            </a:pPr>
+            <a:r>
+              <a:rPr sz="1500" b="0" i="0">
+                <a:solidFill>
+                  <a:srgbClr val="142233"/>
+                </a:solidFill>
+                <a:latin typeface="Arial"/>
+                <a:ea typeface="PingFang SC"/>
+                <a:cs typeface="PingFang SC"/>
+              </a:rPr>
+              <a:t>选一个命名格式（4 选 1）</a:t>
+            </a:r>
+          </a:p>
         </p:txBody>
       </p:sp>
       <p:sp>
@@ -10782,7 +10803,7 @@
                 <a:ea typeface="PingFang SC"/>
                 <a:cs typeface="PingFang SC"/>
               </a:rPr>
-              <a:t>场景 prompt → 出图 → 合 logo</a:t>
+              <a:t>场景 prompt（5 风格挑 1）→ 出图 → 合 logo</a:t>
             </a:r>
           </a:p>
         </p:txBody>

--- a/交付物-doc-pdf-ppt/AI内容课_VerB_CMO战略版_幻灯片_可编辑源(PPTX含NLP备注).pptx
+++ b/交付物-doc-pdf-ppt/AI内容课_VerB_CMO战略版_幻灯片_可编辑源(PPTX含NLP备注).pptx
@@ -11683,7 +11683,7 @@
                 <a:ea typeface="PingFang SC"/>
                 <a:cs typeface="PingFang SC"/>
               </a:rPr>
-              <a:t>8 分镜→锁人物→逐镜→拼接→ChatCut 后期</a:t>
+              <a:t>8 分镜→选人(九宫格)→锁人物→逐镜→拼接→ChatCut 后期</a:t>
             </a:r>
           </a:p>
         </p:txBody>

--- a/交付物-doc-pdf-ppt/AI内容课_VerB_CMO战略版_幻灯片_可编辑源(PPTX含NLP备注).pptx
+++ b/交付物-doc-pdf-ppt/AI内容课_VerB_CMO战略版_幻灯片_可编辑源(PPTX含NLP备注).pptx
@@ -11463,7 +11463,7 @@
                 <a:ea typeface="PingFang SC"/>
                 <a:cs typeface="PingFang SC"/>
               </a:rPr>
-              <a:t>按情绪 prompt Suno 出配乐</a:t>
+              <a:t>Discover 偷写法→Claude 写 prompt→Suno 生成→你听</a:t>
             </a:r>
           </a:p>
         </p:txBody>
@@ -11507,7 +11507,7 @@
                 <a:ea typeface="PingFang SC"/>
                 <a:cs typeface="PingFang SC"/>
               </a:rPr>
-              <a:t>1 段可商用背景乐</a:t>
+              <a:t>1 段垫得住口播的背景乐</a:t>
             </a:r>
           </a:p>
         </p:txBody>
